--- a/上課簡報_作品4_我的溫暖小屋.pptx
+++ b/上課簡報_作品4_我的溫暖小屋.pptx
@@ -5605,224 +5605,24 @@
           </a:p>
         </p:txBody>
       </p:sp>
-      <p:sp>
-        <p:nvSpPr>
-          <p:cNvPr id="5" name="Rectangle 4"/>
-          <p:cNvSpPr/>
-          <p:nvPr/>
-        </p:nvSpPr>
-        <p:spPr>
-          <a:xfrm>
-            <a:off x="411480" y="1234440"/>
-            <a:ext cx="5577840" cy="502920"/>
-          </a:xfrm>
-          <a:prstGeom prst="rect">
-            <a:avLst/>
-          </a:prstGeom>
-          <a:solidFill>
-            <a:srgbClr val="F9CCBD"/>
-          </a:solidFill>
-          <a:ln>
-            <a:noFill/>
-          </a:ln>
-          <a:effectLst/>
-        </p:spPr>
-        <p:style>
-          <a:lnRef idx="1">
-            <a:schemeClr val="accent1"/>
-          </a:lnRef>
-          <a:fillRef idx="3">
-            <a:schemeClr val="accent1"/>
-          </a:fillRef>
-          <a:effectRef idx="2">
-            <a:schemeClr val="accent1"/>
-          </a:effectRef>
-          <a:fontRef idx="minor">
-            <a:schemeClr val="lt1"/>
-          </a:fontRef>
-        </p:style>
-        <p:txBody>
-          <a:bodyPr rtlCol="0" anchor="ctr"/>
-          <a:lstStyle/>
-          <a:p>
-            <a:pPr algn="ctr"/>
-          </a:p>
-        </p:txBody>
-      </p:sp>
-      <p:sp>
-        <p:nvSpPr>
-          <p:cNvPr id="6" name="TextBox 5"/>
-          <p:cNvSpPr txBox="1"/>
-          <p:nvPr/>
-        </p:nvSpPr>
-        <p:spPr>
-          <a:xfrm>
-            <a:off x="411480" y="1261872"/>
-            <a:ext cx="5577840" cy="457200"/>
-          </a:xfrm>
-          <a:prstGeom prst="rect">
-            <a:avLst/>
-          </a:prstGeom>
-          <a:noFill/>
-        </p:spPr>
-        <p:txBody>
-          <a:bodyPr wrap="square" anchor="ctr">
-            <a:spAutoFit/>
-          </a:bodyPr>
-          <a:lstStyle/>
-          <a:p>
-            <a:pPr algn="ctr">
-              <a:lnSpc>
-                <a:spcPct val="100000"/>
-              </a:lnSpc>
-              <a:spcAft>
-                <a:spcPts val="800"/>
-              </a:spcAft>
-            </a:pPr>
-            <a:r>
-              <a:rPr sz="2000" b="1">
-                <a:solidFill>
-                  <a:srgbClr val="EF7043"/>
-                </a:solidFill>
-                <a:latin typeface="微軟正黑體"/>
-                <a:ea typeface="微軟正黑體"/>
-                <a:cs typeface="微軟正黑體"/>
-              </a:rPr>
-              <a:t>小一範例</a:t>
-            </a:r>
-          </a:p>
-        </p:txBody>
-      </p:sp>
       <p:pic>
         <p:nvPicPr>
-          <p:cNvPr id="7" name="Picture 6" descr="work-04-g1.jpg"/>
+          <p:cNvPr id="5" name="Picture 4" descr="work-04-compare.jpg"/>
           <p:cNvPicPr>
             <a:picLocks noChangeAspect="1"/>
           </p:cNvPicPr>
           <p:nvPr/>
         </p:nvPicPr>
         <p:blipFill>
-          <a:blip r:embed="rId2"/>
+          <a:blip r:embed="rId4"/>
           <a:stretch>
             <a:fillRect/>
           </a:stretch>
         </p:blipFill>
         <p:spPr>
           <a:xfrm>
-            <a:off x="514350" y="1828800"/>
-            <a:ext cx="5372100" cy="4297680"/>
-          </a:xfrm>
-          <a:prstGeom prst="rect">
-            <a:avLst/>
-          </a:prstGeom>
-        </p:spPr>
-      </p:pic>
-      <p:sp>
-        <p:nvSpPr>
-          <p:cNvPr id="8" name="Rectangle 7"/>
-          <p:cNvSpPr/>
-          <p:nvPr/>
-        </p:nvSpPr>
-        <p:spPr>
-          <a:xfrm>
-            <a:off x="6217920" y="1234440"/>
-            <a:ext cx="5577840" cy="502920"/>
-          </a:xfrm>
-          <a:prstGeom prst="rect">
-            <a:avLst/>
-          </a:prstGeom>
-          <a:solidFill>
-            <a:srgbClr val="F9CCBD"/>
-          </a:solidFill>
-          <a:ln>
-            <a:noFill/>
-          </a:ln>
-          <a:effectLst/>
-        </p:spPr>
-        <p:style>
-          <a:lnRef idx="1">
-            <a:schemeClr val="accent1"/>
-          </a:lnRef>
-          <a:fillRef idx="3">
-            <a:schemeClr val="accent1"/>
-          </a:fillRef>
-          <a:effectRef idx="2">
-            <a:schemeClr val="accent1"/>
-          </a:effectRef>
-          <a:fontRef idx="minor">
-            <a:schemeClr val="lt1"/>
-          </a:fontRef>
-        </p:style>
-        <p:txBody>
-          <a:bodyPr rtlCol="0" anchor="ctr"/>
-          <a:lstStyle/>
-          <a:p>
-            <a:pPr algn="ctr"/>
-          </a:p>
-        </p:txBody>
-      </p:sp>
-      <p:sp>
-        <p:nvSpPr>
-          <p:cNvPr id="9" name="TextBox 8"/>
-          <p:cNvSpPr txBox="1"/>
-          <p:nvPr/>
-        </p:nvSpPr>
-        <p:spPr>
-          <a:xfrm>
-            <a:off x="6217920" y="1261872"/>
-            <a:ext cx="5577840" cy="457200"/>
-          </a:xfrm>
-          <a:prstGeom prst="rect">
-            <a:avLst/>
-          </a:prstGeom>
-          <a:noFill/>
-        </p:spPr>
-        <p:txBody>
-          <a:bodyPr wrap="square" anchor="ctr">
-            <a:spAutoFit/>
-          </a:bodyPr>
-          <a:lstStyle/>
-          <a:p>
-            <a:pPr algn="ctr">
-              <a:lnSpc>
-                <a:spcPct val="100000"/>
-              </a:lnSpc>
-              <a:spcAft>
-                <a:spcPts val="800"/>
-              </a:spcAft>
-            </a:pPr>
-            <a:r>
-              <a:rPr sz="2000" b="1">
-                <a:solidFill>
-                  <a:srgbClr val="EF7043"/>
-                </a:solidFill>
-                <a:latin typeface="微軟正黑體"/>
-                <a:ea typeface="微軟正黑體"/>
-                <a:cs typeface="微軟正黑體"/>
-              </a:rPr>
-              <a:t>小二範例</a:t>
-            </a:r>
-          </a:p>
-        </p:txBody>
-      </p:sp>
-      <p:pic>
-        <p:nvPicPr>
-          <p:cNvPr id="10" name="Picture 9" descr="work-04-g2.jpg"/>
-          <p:cNvPicPr>
-            <a:picLocks noChangeAspect="1"/>
-          </p:cNvPicPr>
-          <p:nvPr/>
-        </p:nvPicPr>
-        <p:blipFill>
-          <a:blip r:embed="rId3"/>
-          <a:stretch>
-            <a:fillRect/>
-          </a:stretch>
-        </p:blipFill>
-        <p:spPr>
-          <a:xfrm>
-            <a:off x="6320790" y="1828800"/>
-            <a:ext cx="5372100" cy="4297680"/>
+            <a:off x="2529687" y="1572768"/>
+            <a:ext cx="7132320" cy="4754880"/>
           </a:xfrm>
           <a:prstGeom prst="rect">
             <a:avLst/>

--- a/上課簡報_作品4_我的溫暖小屋.pptx
+++ b/上課簡報_作品4_我的溫暖小屋.pptx
@@ -3430,7 +3430,7 @@
                 <a:ea typeface="微軟正黑體"/>
                 <a:cs typeface="微軟正黑體"/>
               </a:rPr>
-              <a:t>紙黏土＋多媒材</a:t>
+              <a:t>寶特瓶＋多媒材</a:t>
             </a:r>
           </a:p>
           <a:p>
@@ -4050,7 +4050,7 @@
                 <a:ea typeface="微軟正黑體"/>
                 <a:cs typeface="微軟正黑體"/>
               </a:rPr>
-              <a:t>小紙盒</a:t>
+              <a:t>寶特瓶</a:t>
             </a:r>
           </a:p>
         </p:txBody>
@@ -4728,7 +4728,7 @@
                 <a:ea typeface="微軟正黑體"/>
                 <a:cs typeface="微軟正黑體"/>
               </a:rPr>
-              <a:t>學做牆壁、屋頂、門和窗</a:t>
+              <a:t>把寶特瓶做成牆壁、屋頂、門和窗</a:t>
             </a:r>
           </a:p>
         </p:txBody>
@@ -4860,7 +4860,7 @@
                 <a:ea typeface="微軟正黑體"/>
                 <a:cs typeface="微軟正黑體"/>
               </a:rPr>
-              <a:t>搭出我的小屋</a:t>
+              <a:t>裝飾成我的小屋筆筒</a:t>
             </a:r>
           </a:p>
         </p:txBody>
@@ -5450,7 +5450,7 @@
                 <a:ea typeface="微軟正黑體"/>
                 <a:cs typeface="微軟正黑體"/>
               </a:rPr>
-              <a:t>用鈕扣、押花裝飾，放進珍貴小物</a:t>
+              <a:t>用色紙、鈕扣裝飾，放進鉛筆或珍貴小物</a:t>
             </a:r>
           </a:p>
         </p:txBody>
@@ -5614,7 +5614,7 @@
           <p:nvPr/>
         </p:nvPicPr>
         <p:blipFill>
-          <a:blip r:embed="rId4"/>
+          <a:blip r:embed="rId5"/>
           <a:stretch>
             <a:fillRect/>
           </a:stretch>

--- a/上課簡報_作品4_我的溫暖小屋.pptx
+++ b/上課簡報_作品4_我的溫暖小屋.pptx
@@ -3433,38 +3433,6 @@
               <a:t>寶特瓶＋多媒材</a:t>
             </a:r>
           </a:p>
-          <a:p>
-            <a:pPr algn="l">
-              <a:lnSpc>
-                <a:spcPct val="100000"/>
-              </a:lnSpc>
-              <a:spcAft>
-                <a:spcPts val="800"/>
-              </a:spcAft>
-            </a:pPr>
-            <a:r>
-              <a:rPr sz="1800" b="1">
-                <a:solidFill>
-                  <a:srgbClr val="EF7043"/>
-                </a:solidFill>
-                <a:latin typeface="微軟正黑體"/>
-                <a:ea typeface="微軟正黑體"/>
-                <a:cs typeface="微軟正黑體"/>
-              </a:rPr>
-              <a:t>上課日期：</a:t>
-            </a:r>
-            <a:r>
-              <a:rPr sz="1800" b="0">
-                <a:solidFill>
-                  <a:srgbClr val="444444"/>
-                </a:solidFill>
-                <a:latin typeface="微軟正黑體"/>
-                <a:ea typeface="微軟正黑體"/>
-                <a:cs typeface="微軟正黑體"/>
-              </a:rPr>
-              <a:t>10/30 ・ 11/6（週五）</a:t>
-            </a:r>
-          </a:p>
         </p:txBody>
       </p:sp>
       <p:pic>
@@ -4464,7 +4432,7 @@
                 <a:ea typeface="微軟正黑體"/>
                 <a:cs typeface="微軟正黑體"/>
               </a:rPr>
-              <a:t>（10/30 週五）</a:t>
+              <a:t/>
             </a:r>
           </a:p>
         </p:txBody>
@@ -5186,7 +5154,7 @@
                 <a:ea typeface="微軟正黑體"/>
                 <a:cs typeface="微軟正黑體"/>
               </a:rPr>
-              <a:t>（11/6 週五）</a:t>
+              <a:t/>
             </a:r>
           </a:p>
         </p:txBody>

--- a/上課簡報_作品4_我的溫暖小屋.pptx
+++ b/上課簡報_作品4_我的溫暖小屋.pptx
@@ -10,6 +10,7 @@
     <p:sldId id="258" r:id="rId9"/>
     <p:sldId id="259" r:id="rId10"/>
     <p:sldId id="260" r:id="rId11"/>
+    <p:sldId id="264" r:id="rId15"/>
     <p:sldId id="261" r:id="rId12"/>
     <p:sldId id="262" r:id="rId13"/>
     <p:sldId id="263" r:id="rId14"/>
@@ -6071,6 +6072,81 @@
           </a:p>
         </p:txBody>
       </p:sp>
+    </p:spTree>
+  </p:cSld>
+  <p:clrMapOvr>
+    <a:masterClrMapping/>
+  </p:clrMapOvr>
+</p:sld>
+</file>
+
+<file path=ppt/slides/slide9.xml><?xml version="1.0" encoding="utf-8"?>
+<p:sld xmlns:a="http://schemas.openxmlformats.org/drawingml/2006/main" xmlns:p="http://schemas.openxmlformats.org/presentationml/2006/main" xmlns:r="http://schemas.openxmlformats.org/officeDocument/2006/relationships">
+  <p:cSld>
+    <p:spTree>
+      <p:nvGrpSpPr>
+        <p:cNvPr id="1" name=""/>
+        <p:cNvGrpSpPr/>
+        <p:nvPr/>
+      </p:nvGrpSpPr>
+      <p:grpSpPr/>
+      <p:sp>
+        <p:nvSpPr>
+          <p:cNvPr id="2" name="TextBox 1"/>
+          <p:cNvSpPr txBox="1"/>
+          <p:nvPr/>
+        </p:nvSpPr>
+        <p:spPr>
+          <a:xfrm>
+            <a:off x="548640" y="320040"/>
+            <a:ext cx="11064240" cy="822960"/>
+          </a:xfrm>
+          <a:prstGeom prst="rect">
+            <a:avLst/>
+          </a:prstGeom>
+          <a:noFill/>
+        </p:spPr>
+        <p:txBody>
+          <a:bodyPr wrap="none">
+            <a:spAutoFit/>
+          </a:bodyPr>
+          <a:lstStyle/>
+          <a:p>
+            <a:r>
+              <a:rPr sz="3000" b="1">
+                <a:solidFill>
+                  <a:srgbClr val="5B3A8E"/>
+                </a:solidFill>
+              </a:rPr>
+              <a:t>🔧 製作步驟（圖解）</a:t>
+            </a:r>
+          </a:p>
+        </p:txBody>
+      </p:sp>
+      <p:pic>
+        <p:nvPicPr>
+          <p:cNvPr id="3" name="Picture 2" descr="work-04-steps.png"/>
+          <p:cNvPicPr>
+            <a:picLocks noChangeAspect="1"/>
+          </p:cNvPicPr>
+          <p:nvPr/>
+        </p:nvPicPr>
+        <p:blipFill>
+          <a:blip r:embed="rId2"/>
+          <a:stretch>
+            <a:fillRect/>
+          </a:stretch>
+        </p:blipFill>
+        <p:spPr>
+          <a:xfrm>
+            <a:off x="335127" y="1600200"/>
+            <a:ext cx="11521440" cy="4215160"/>
+          </a:xfrm>
+          <a:prstGeom prst="rect">
+            <a:avLst/>
+          </a:prstGeom>
+        </p:spPr>
+      </p:pic>
     </p:spTree>
   </p:cSld>
   <p:clrMapOvr>

--- a/上課簡報_作品4_我的溫暖小屋.pptx
+++ b/上課簡報_作品4_我的溫暖小屋.pptx
@@ -5444,154 +5444,55 @@
       <p:grpSpPr/>
       <p:sp>
         <p:nvSpPr>
-          <p:cNvPr id="2" name="Rectangle 1"/>
-          <p:cNvSpPr/>
-          <p:nvPr/>
-        </p:nvSpPr>
-        <p:spPr>
-          <a:xfrm>
-            <a:off x="0" y="0"/>
-            <a:ext cx="12191695" cy="6858000"/>
+          <p:cNvPr id="2" name="TextBox 1"/>
+          <p:cNvSpPr txBox="1"/>
+          <p:nvPr/>
+        </p:nvSpPr>
+        <p:spPr>
+          <a:xfrm>
+            <a:off x="548640" y="320040"/>
+            <a:ext cx="11064240" cy="822960"/>
           </a:xfrm>
           <a:prstGeom prst="rect">
             <a:avLst/>
           </a:prstGeom>
-          <a:solidFill>
-            <a:srgbClr val="FFFDF8"/>
-          </a:solidFill>
-          <a:ln>
-            <a:noFill/>
-          </a:ln>
-          <a:effectLst/>
-        </p:spPr>
-        <p:style>
-          <a:lnRef idx="1">
-            <a:schemeClr val="accent1"/>
-          </a:lnRef>
-          <a:fillRef idx="3">
-            <a:schemeClr val="accent1"/>
-          </a:fillRef>
-          <a:effectRef idx="2">
-            <a:schemeClr val="accent1"/>
-          </a:effectRef>
-          <a:fontRef idx="minor">
-            <a:schemeClr val="lt1"/>
-          </a:fontRef>
-        </p:style>
-        <p:txBody>
-          <a:bodyPr rtlCol="0" anchor="ctr"/>
-          <a:lstStyle/>
-          <a:p>
-            <a:pPr algn="ctr"/>
-          </a:p>
-        </p:txBody>
-      </p:sp>
-      <p:sp>
-        <p:nvSpPr>
-          <p:cNvPr id="3" name="Rectangle 2"/>
-          <p:cNvSpPr/>
-          <p:nvPr/>
-        </p:nvSpPr>
-        <p:spPr>
-          <a:xfrm>
-            <a:off x="0" y="0"/>
-            <a:ext cx="12191695" cy="1051560"/>
-          </a:xfrm>
-          <a:prstGeom prst="rect">
-            <a:avLst/>
-          </a:prstGeom>
-          <a:solidFill>
-            <a:srgbClr val="EF7043"/>
-          </a:solidFill>
-          <a:ln>
-            <a:noFill/>
-          </a:ln>
-          <a:effectLst/>
-        </p:spPr>
-        <p:style>
-          <a:lnRef idx="1">
-            <a:schemeClr val="accent1"/>
-          </a:lnRef>
-          <a:fillRef idx="3">
-            <a:schemeClr val="accent1"/>
-          </a:fillRef>
-          <a:effectRef idx="2">
-            <a:schemeClr val="accent1"/>
-          </a:effectRef>
-          <a:fontRef idx="minor">
-            <a:schemeClr val="lt1"/>
-          </a:fontRef>
-        </p:style>
-        <p:txBody>
-          <a:bodyPr rtlCol="0" anchor="ctr"/>
-          <a:lstStyle/>
-          <a:p>
-            <a:pPr algn="ctr"/>
-          </a:p>
-        </p:txBody>
-      </p:sp>
-      <p:sp>
-        <p:nvSpPr>
-          <p:cNvPr id="4" name="TextBox 3"/>
-          <p:cNvSpPr txBox="1"/>
-          <p:nvPr/>
-        </p:nvSpPr>
-        <p:spPr>
-          <a:xfrm>
-            <a:off x="548640" y="182880"/>
-            <a:ext cx="11064240" cy="731520"/>
-          </a:xfrm>
-          <a:prstGeom prst="rect">
-            <a:avLst/>
-          </a:prstGeom>
           <a:noFill/>
         </p:spPr>
         <p:txBody>
-          <a:bodyPr wrap="square" anchor="ctr">
+          <a:bodyPr wrap="none">
             <a:spAutoFit/>
           </a:bodyPr>
           <a:lstStyle/>
           <a:p>
-            <a:pPr algn="l">
-              <a:lnSpc>
-                <a:spcPct val="100000"/>
-              </a:lnSpc>
-              <a:spcAft>
-                <a:spcPts val="800"/>
-              </a:spcAft>
-            </a:pPr>
-            <a:r>
-              <a:rPr sz="3200" b="1">
+            <a:r>
+              <a:rPr sz="3000" b="1">
                 <a:solidFill>
-                  <a:srgbClr val="FFFFFF"/>
+                  <a:srgbClr val="5B3A8E"/>
                 </a:solidFill>
-                <a:latin typeface="微軟正黑體"/>
-                <a:ea typeface="微軟正黑體"/>
-                <a:cs typeface="微軟正黑體"/>
               </a:rPr>
-              <a:t>看看別的小朋友做的～</a:t>
+              <a:t>🔧 製作步驟（圖解）</a:t>
             </a:r>
           </a:p>
         </p:txBody>
       </p:sp>
       <p:pic>
         <p:nvPicPr>
-          <p:cNvPr id="5" name="Picture 4" descr="work-04-compare.jpg"/>
+          <p:cNvPr id="3" name="Picture 2" descr="work-04-steps.png"/>
           <p:cNvPicPr>
             <a:picLocks noChangeAspect="1"/>
           </p:cNvPicPr>
           <p:nvPr/>
         </p:nvPicPr>
         <p:blipFill>
-          <a:blip r:embed="rId5"/>
+          <a:blip r:embed="rId3"/>
           <a:stretch>
             <a:fillRect/>
           </a:stretch>
         </p:blipFill>
         <p:spPr>
           <a:xfrm>
-            <a:off x="2529687" y="1572768"/>
-            <a:ext cx="7132320" cy="4754880"/>
+            <a:off x="335127" y="1600200"/>
+            <a:ext cx="11521440" cy="4215160"/>
           </a:xfrm>
           <a:prstGeom prst="rect">
             <a:avLst/>
@@ -5675,7 +5576,7 @@
             <a:avLst/>
           </a:prstGeom>
           <a:solidFill>
-            <a:srgbClr val="F6A623"/>
+            <a:srgbClr val="EF7043"/>
           </a:solidFill>
           <a:ln>
             <a:noFill/>
@@ -5743,99 +5644,35 @@
                 <a:ea typeface="微軟正黑體"/>
                 <a:cs typeface="微軟正黑體"/>
               </a:rPr>
-              <a:t>一起想一想</a:t>
-            </a:r>
-          </a:p>
-        </p:txBody>
-      </p:sp>
-      <p:sp>
-        <p:nvSpPr>
-          <p:cNvPr id="5" name="Rectangle 4"/>
-          <p:cNvSpPr/>
-          <p:nvPr/>
-        </p:nvSpPr>
-        <p:spPr>
-          <a:xfrm>
-            <a:off x="1097280" y="1828800"/>
-            <a:ext cx="9966960" cy="3108960"/>
+              <a:t>看看別的小朋友做的～</a:t>
+            </a:r>
+          </a:p>
+        </p:txBody>
+      </p:sp>
+      <p:pic>
+        <p:nvPicPr>
+          <p:cNvPr id="5" name="Picture 4" descr="work-04-compare.jpg"/>
+          <p:cNvPicPr>
+            <a:picLocks noChangeAspect="1"/>
+          </p:cNvPicPr>
+          <p:nvPr/>
+        </p:nvPicPr>
+        <p:blipFill>
+          <a:blip r:embed="rId5"/>
+          <a:stretch>
+            <a:fillRect/>
+          </a:stretch>
+        </p:blipFill>
+        <p:spPr>
+          <a:xfrm>
+            <a:off x="2529687" y="1572768"/>
+            <a:ext cx="7132320" cy="4754880"/>
           </a:xfrm>
           <a:prstGeom prst="rect">
             <a:avLst/>
           </a:prstGeom>
-          <a:solidFill>
-            <a:srgbClr val="FFF1D6"/>
-          </a:solidFill>
-          <a:ln>
-            <a:noFill/>
-          </a:ln>
-          <a:effectLst/>
-        </p:spPr>
-        <p:style>
-          <a:lnRef idx="1">
-            <a:schemeClr val="accent1"/>
-          </a:lnRef>
-          <a:fillRef idx="3">
-            <a:schemeClr val="accent1"/>
-          </a:fillRef>
-          <a:effectRef idx="2">
-            <a:schemeClr val="accent1"/>
-          </a:effectRef>
-          <a:fontRef idx="minor">
-            <a:schemeClr val="lt1"/>
-          </a:fontRef>
-        </p:style>
-        <p:txBody>
-          <a:bodyPr rtlCol="0" anchor="ctr"/>
-          <a:lstStyle/>
-          <a:p>
-            <a:pPr algn="ctr"/>
-          </a:p>
-        </p:txBody>
-      </p:sp>
-      <p:sp>
-        <p:nvSpPr>
-          <p:cNvPr id="6" name="TextBox 5"/>
-          <p:cNvSpPr txBox="1"/>
-          <p:nvPr/>
-        </p:nvSpPr>
-        <p:spPr>
-          <a:xfrm>
-            <a:off x="1371600" y="1828800"/>
-            <a:ext cx="9418320" cy="3108960"/>
-          </a:xfrm>
-          <a:prstGeom prst="rect">
-            <a:avLst/>
-          </a:prstGeom>
-          <a:noFill/>
-        </p:spPr>
-        <p:txBody>
-          <a:bodyPr wrap="square" anchor="ctr">
-            <a:spAutoFit/>
-          </a:bodyPr>
-          <a:lstStyle/>
-          <a:p>
-            <a:pPr algn="ctr">
-              <a:lnSpc>
-                <a:spcPct val="130000"/>
-              </a:lnSpc>
-              <a:spcAft>
-                <a:spcPts val="800"/>
-              </a:spcAft>
-            </a:pPr>
-            <a:r>
-              <a:rPr sz="3800" b="1">
-                <a:solidFill>
-                  <a:srgbClr val="C0392B"/>
-                </a:solidFill>
-                <a:latin typeface="微軟正黑體"/>
-                <a:ea typeface="微軟正黑體"/>
-                <a:cs typeface="微軟正黑體"/>
-              </a:rPr>
-              <a:t>如果小屋會說話，它會怎麼安慰你？</a:t>
-            </a:r>
-          </a:p>
-        </p:txBody>
-      </p:sp>
+        </p:spPr>
+      </p:pic>
     </p:spTree>
   </p:cSld>
   <p:clrMapOvr>
@@ -5869,7 +5706,7 @@
             <a:avLst/>
           </a:prstGeom>
           <a:solidFill>
-            <a:srgbClr val="EF7043"/>
+            <a:srgbClr val="FFFDF8"/>
           </a:solidFill>
           <a:ln>
             <a:noFill/>
@@ -5907,13 +5744,13 @@
         <p:spPr>
           <a:xfrm>
             <a:off x="0" y="0"/>
-            <a:ext cx="12191695" cy="256032"/>
+            <a:ext cx="12191695" cy="1051560"/>
           </a:xfrm>
           <a:prstGeom prst="rect">
             <a:avLst/>
           </a:prstGeom>
           <a:solidFill>
-            <a:srgbClr val="FFCA28"/>
+            <a:srgbClr val="F6A623"/>
           </a:solidFill>
           <a:ln>
             <a:noFill/>
@@ -5944,101 +5781,36 @@
       </p:sp>
       <p:sp>
         <p:nvSpPr>
-          <p:cNvPr id="4" name="Rectangle 3"/>
-          <p:cNvSpPr/>
-          <p:nvPr/>
-        </p:nvSpPr>
-        <p:spPr>
-          <a:xfrm>
-            <a:off x="0" y="6601968"/>
-            <a:ext cx="12191695" cy="256032"/>
+          <p:cNvPr id="4" name="TextBox 3"/>
+          <p:cNvSpPr txBox="1"/>
+          <p:nvPr/>
+        </p:nvSpPr>
+        <p:spPr>
+          <a:xfrm>
+            <a:off x="548640" y="182880"/>
+            <a:ext cx="11064240" cy="731520"/>
           </a:xfrm>
           <a:prstGeom prst="rect">
             <a:avLst/>
           </a:prstGeom>
-          <a:solidFill>
-            <a:srgbClr val="FFCA28"/>
-          </a:solidFill>
-          <a:ln>
-            <a:noFill/>
-          </a:ln>
-          <a:effectLst/>
-        </p:spPr>
-        <p:style>
-          <a:lnRef idx="1">
-            <a:schemeClr val="accent1"/>
-          </a:lnRef>
-          <a:fillRef idx="3">
-            <a:schemeClr val="accent1"/>
-          </a:fillRef>
-          <a:effectRef idx="2">
-            <a:schemeClr val="accent1"/>
-          </a:effectRef>
-          <a:fontRef idx="minor">
-            <a:schemeClr val="lt1"/>
-          </a:fontRef>
-        </p:style>
-        <p:txBody>
-          <a:bodyPr rtlCol="0" anchor="ctr"/>
-          <a:lstStyle/>
-          <a:p>
-            <a:pPr algn="ctr"/>
-          </a:p>
-        </p:txBody>
-      </p:sp>
-      <p:sp>
-        <p:nvSpPr>
-          <p:cNvPr id="5" name="TextBox 4"/>
-          <p:cNvSpPr txBox="1"/>
-          <p:nvPr/>
-        </p:nvSpPr>
-        <p:spPr>
-          <a:xfrm>
-            <a:off x="914400" y="2103120"/>
-            <a:ext cx="10332720" cy="2560320"/>
-          </a:xfrm>
-          <a:prstGeom prst="rect">
-            <a:avLst/>
-          </a:prstGeom>
           <a:noFill/>
         </p:spPr>
         <p:txBody>
-          <a:bodyPr wrap="square" anchor="t">
+          <a:bodyPr wrap="square" anchor="ctr">
             <a:spAutoFit/>
           </a:bodyPr>
           <a:lstStyle/>
           <a:p>
-            <a:pPr algn="ctr">
+            <a:pPr algn="l">
               <a:lnSpc>
-                <a:spcPct val="120000"/>
+                <a:spcPct val="100000"/>
               </a:lnSpc>
               <a:spcAft>
-                <a:spcPts val="1400"/>
+                <a:spcPts val="800"/>
               </a:spcAft>
             </a:pPr>
             <a:r>
-              <a:rPr sz="4400" b="1">
-                <a:solidFill>
-                  <a:srgbClr val="FFE082"/>
-                </a:solidFill>
-                <a:latin typeface="微軟正黑體"/>
-                <a:ea typeface="微軟正黑體"/>
-                <a:cs typeface="微軟正黑體"/>
-              </a:rPr>
-              <a:t>我們完成了！　</a:t>
-            </a:r>
-          </a:p>
-          <a:p>
-            <a:pPr algn="ctr">
-              <a:lnSpc>
-                <a:spcPct val="120000"/>
-              </a:lnSpc>
-              <a:spcAft>
-                <a:spcPts val="1400"/>
-              </a:spcAft>
-            </a:pPr>
-            <a:r>
-              <a:rPr sz="2600" b="0">
+              <a:rPr sz="3200" b="1">
                 <a:solidFill>
                   <a:srgbClr val="FFFFFF"/>
                 </a:solidFill>
@@ -6046,28 +5818,95 @@
                 <a:ea typeface="微軟正黑體"/>
                 <a:cs typeface="微軟正黑體"/>
               </a:rPr>
-              <a:t>一起把桌子收拾乾淨、工具放回家，</a:t>
-            </a:r>
-          </a:p>
+              <a:t>一起想一想</a:t>
+            </a:r>
+          </a:p>
+        </p:txBody>
+      </p:sp>
+      <p:sp>
+        <p:nvSpPr>
+          <p:cNvPr id="5" name="Rectangle 4"/>
+          <p:cNvSpPr/>
+          <p:nvPr/>
+        </p:nvSpPr>
+        <p:spPr>
+          <a:xfrm>
+            <a:off x="1097280" y="1828800"/>
+            <a:ext cx="9966960" cy="3108960"/>
+          </a:xfrm>
+          <a:prstGeom prst="rect">
+            <a:avLst/>
+          </a:prstGeom>
+          <a:solidFill>
+            <a:srgbClr val="FFF1D6"/>
+          </a:solidFill>
+          <a:ln>
+            <a:noFill/>
+          </a:ln>
+          <a:effectLst/>
+        </p:spPr>
+        <p:style>
+          <a:lnRef idx="1">
+            <a:schemeClr val="accent1"/>
+          </a:lnRef>
+          <a:fillRef idx="3">
+            <a:schemeClr val="accent1"/>
+          </a:fillRef>
+          <a:effectRef idx="2">
+            <a:schemeClr val="accent1"/>
+          </a:effectRef>
+          <a:fontRef idx="minor">
+            <a:schemeClr val="lt1"/>
+          </a:fontRef>
+        </p:style>
+        <p:txBody>
+          <a:bodyPr rtlCol="0" anchor="ctr"/>
+          <a:lstStyle/>
+          <a:p>
+            <a:pPr algn="ctr"/>
+          </a:p>
+        </p:txBody>
+      </p:sp>
+      <p:sp>
+        <p:nvSpPr>
+          <p:cNvPr id="6" name="TextBox 5"/>
+          <p:cNvSpPr txBox="1"/>
+          <p:nvPr/>
+        </p:nvSpPr>
+        <p:spPr>
+          <a:xfrm>
+            <a:off x="1371600" y="1828800"/>
+            <a:ext cx="9418320" cy="3108960"/>
+          </a:xfrm>
+          <a:prstGeom prst="rect">
+            <a:avLst/>
+          </a:prstGeom>
+          <a:noFill/>
+        </p:spPr>
+        <p:txBody>
+          <a:bodyPr wrap="square" anchor="ctr">
+            <a:spAutoFit/>
+          </a:bodyPr>
+          <a:lstStyle/>
           <a:p>
             <a:pPr algn="ctr">
               <a:lnSpc>
-                <a:spcPct val="120000"/>
+                <a:spcPct val="130000"/>
               </a:lnSpc>
               <a:spcAft>
-                <a:spcPts val="1400"/>
+                <a:spcPts val="800"/>
               </a:spcAft>
             </a:pPr>
             <a:r>
-              <a:rPr sz="2600" b="0">
+              <a:rPr sz="3800" b="1">
                 <a:solidFill>
-                  <a:srgbClr val="FFFFFF"/>
+                  <a:srgbClr val="C0392B"/>
                 </a:solidFill>
                 <a:latin typeface="微軟正黑體"/>
                 <a:ea typeface="微軟正黑體"/>
                 <a:cs typeface="微軟正黑體"/>
               </a:rPr>
-              <a:t>再跟大家分享：我最喜歡自己作品的哪裡？</a:t>
+              <a:t>如果小屋會說話，它會怎麼安慰你？</a:t>
             </a:r>
           </a:p>
         </p:txBody>
@@ -6092,14 +5931,146 @@
       <p:grpSpPr/>
       <p:sp>
         <p:nvSpPr>
-          <p:cNvPr id="2" name="TextBox 1"/>
+          <p:cNvPr id="2" name="Rectangle 1"/>
+          <p:cNvSpPr/>
+          <p:nvPr/>
+        </p:nvSpPr>
+        <p:spPr>
+          <a:xfrm>
+            <a:off x="0" y="0"/>
+            <a:ext cx="12191695" cy="6858000"/>
+          </a:xfrm>
+          <a:prstGeom prst="rect">
+            <a:avLst/>
+          </a:prstGeom>
+          <a:solidFill>
+            <a:srgbClr val="EF7043"/>
+          </a:solidFill>
+          <a:ln>
+            <a:noFill/>
+          </a:ln>
+          <a:effectLst/>
+        </p:spPr>
+        <p:style>
+          <a:lnRef idx="1">
+            <a:schemeClr val="accent1"/>
+          </a:lnRef>
+          <a:fillRef idx="3">
+            <a:schemeClr val="accent1"/>
+          </a:fillRef>
+          <a:effectRef idx="2">
+            <a:schemeClr val="accent1"/>
+          </a:effectRef>
+          <a:fontRef idx="minor">
+            <a:schemeClr val="lt1"/>
+          </a:fontRef>
+        </p:style>
+        <p:txBody>
+          <a:bodyPr rtlCol="0" anchor="ctr"/>
+          <a:lstStyle/>
+          <a:p>
+            <a:pPr algn="ctr"/>
+          </a:p>
+        </p:txBody>
+      </p:sp>
+      <p:sp>
+        <p:nvSpPr>
+          <p:cNvPr id="3" name="Rectangle 2"/>
+          <p:cNvSpPr/>
+          <p:nvPr/>
+        </p:nvSpPr>
+        <p:spPr>
+          <a:xfrm>
+            <a:off x="0" y="0"/>
+            <a:ext cx="12191695" cy="256032"/>
+          </a:xfrm>
+          <a:prstGeom prst="rect">
+            <a:avLst/>
+          </a:prstGeom>
+          <a:solidFill>
+            <a:srgbClr val="FFCA28"/>
+          </a:solidFill>
+          <a:ln>
+            <a:noFill/>
+          </a:ln>
+          <a:effectLst/>
+        </p:spPr>
+        <p:style>
+          <a:lnRef idx="1">
+            <a:schemeClr val="accent1"/>
+          </a:lnRef>
+          <a:fillRef idx="3">
+            <a:schemeClr val="accent1"/>
+          </a:fillRef>
+          <a:effectRef idx="2">
+            <a:schemeClr val="accent1"/>
+          </a:effectRef>
+          <a:fontRef idx="minor">
+            <a:schemeClr val="lt1"/>
+          </a:fontRef>
+        </p:style>
+        <p:txBody>
+          <a:bodyPr rtlCol="0" anchor="ctr"/>
+          <a:lstStyle/>
+          <a:p>
+            <a:pPr algn="ctr"/>
+          </a:p>
+        </p:txBody>
+      </p:sp>
+      <p:sp>
+        <p:nvSpPr>
+          <p:cNvPr id="4" name="Rectangle 3"/>
+          <p:cNvSpPr/>
+          <p:nvPr/>
+        </p:nvSpPr>
+        <p:spPr>
+          <a:xfrm>
+            <a:off x="0" y="6601968"/>
+            <a:ext cx="12191695" cy="256032"/>
+          </a:xfrm>
+          <a:prstGeom prst="rect">
+            <a:avLst/>
+          </a:prstGeom>
+          <a:solidFill>
+            <a:srgbClr val="FFCA28"/>
+          </a:solidFill>
+          <a:ln>
+            <a:noFill/>
+          </a:ln>
+          <a:effectLst/>
+        </p:spPr>
+        <p:style>
+          <a:lnRef idx="1">
+            <a:schemeClr val="accent1"/>
+          </a:lnRef>
+          <a:fillRef idx="3">
+            <a:schemeClr val="accent1"/>
+          </a:fillRef>
+          <a:effectRef idx="2">
+            <a:schemeClr val="accent1"/>
+          </a:effectRef>
+          <a:fontRef idx="minor">
+            <a:schemeClr val="lt1"/>
+          </a:fontRef>
+        </p:style>
+        <p:txBody>
+          <a:bodyPr rtlCol="0" anchor="ctr"/>
+          <a:lstStyle/>
+          <a:p>
+            <a:pPr algn="ctr"/>
+          </a:p>
+        </p:txBody>
+      </p:sp>
+      <p:sp>
+        <p:nvSpPr>
+          <p:cNvPr id="5" name="TextBox 4"/>
           <p:cNvSpPr txBox="1"/>
           <p:nvPr/>
         </p:nvSpPr>
         <p:spPr>
           <a:xfrm>
-            <a:off x="548640" y="320040"/>
-            <a:ext cx="11064240" cy="822960"/>
+            <a:off x="914400" y="2103120"/>
+            <a:ext cx="10332720" cy="2560320"/>
           </a:xfrm>
           <a:prstGeom prst="rect">
             <a:avLst/>
@@ -6107,46 +6078,75 @@
           <a:noFill/>
         </p:spPr>
         <p:txBody>
-          <a:bodyPr wrap="none">
+          <a:bodyPr wrap="square" anchor="t">
             <a:spAutoFit/>
           </a:bodyPr>
           <a:lstStyle/>
           <a:p>
-            <a:r>
-              <a:rPr sz="3000" b="1">
+            <a:pPr algn="ctr">
+              <a:lnSpc>
+                <a:spcPct val="120000"/>
+              </a:lnSpc>
+              <a:spcAft>
+                <a:spcPts val="1400"/>
+              </a:spcAft>
+            </a:pPr>
+            <a:r>
+              <a:rPr sz="4400" b="1">
                 <a:solidFill>
-                  <a:srgbClr val="5B3A8E"/>
+                  <a:srgbClr val="FFE082"/>
                 </a:solidFill>
+                <a:latin typeface="微軟正黑體"/>
+                <a:ea typeface="微軟正黑體"/>
+                <a:cs typeface="微軟正黑體"/>
               </a:rPr>
-              <a:t>🔧 製作步驟（圖解）</a:t>
-            </a:r>
-          </a:p>
-        </p:txBody>
-      </p:sp>
-      <p:pic>
-        <p:nvPicPr>
-          <p:cNvPr id="3" name="Picture 2" descr="work-04-steps.png"/>
-          <p:cNvPicPr>
-            <a:picLocks noChangeAspect="1"/>
-          </p:cNvPicPr>
-          <p:nvPr/>
-        </p:nvPicPr>
-        <p:blipFill>
-          <a:blip r:embed="rId2"/>
-          <a:stretch>
-            <a:fillRect/>
-          </a:stretch>
-        </p:blipFill>
-        <p:spPr>
-          <a:xfrm>
-            <a:off x="335127" y="1600200"/>
-            <a:ext cx="11521440" cy="4215160"/>
-          </a:xfrm>
-          <a:prstGeom prst="rect">
-            <a:avLst/>
-          </a:prstGeom>
-        </p:spPr>
-      </p:pic>
+              <a:t>我們完成了！　</a:t>
+            </a:r>
+          </a:p>
+          <a:p>
+            <a:pPr algn="ctr">
+              <a:lnSpc>
+                <a:spcPct val="120000"/>
+              </a:lnSpc>
+              <a:spcAft>
+                <a:spcPts val="1400"/>
+              </a:spcAft>
+            </a:pPr>
+            <a:r>
+              <a:rPr sz="2600" b="0">
+                <a:solidFill>
+                  <a:srgbClr val="FFFFFF"/>
+                </a:solidFill>
+                <a:latin typeface="微軟正黑體"/>
+                <a:ea typeface="微軟正黑體"/>
+                <a:cs typeface="微軟正黑體"/>
+              </a:rPr>
+              <a:t>一起把桌子收拾乾淨、工具放回家，</a:t>
+            </a:r>
+          </a:p>
+          <a:p>
+            <a:pPr algn="ctr">
+              <a:lnSpc>
+                <a:spcPct val="120000"/>
+              </a:lnSpc>
+              <a:spcAft>
+                <a:spcPts val="1400"/>
+              </a:spcAft>
+            </a:pPr>
+            <a:r>
+              <a:rPr sz="2600" b="0">
+                <a:solidFill>
+                  <a:srgbClr val="FFFFFF"/>
+                </a:solidFill>
+                <a:latin typeface="微軟正黑體"/>
+                <a:ea typeface="微軟正黑體"/>
+                <a:cs typeface="微軟正黑體"/>
+              </a:rPr>
+              <a:t>再跟大家分享：我最喜歡自己作品的哪裡？</a:t>
+            </a:r>
+          </a:p>
+        </p:txBody>
+      </p:sp>
     </p:spTree>
   </p:cSld>
   <p:clrMapOvr>
